--- a/docs/CS790_Group3_Poster.pptx
+++ b/docs/CS790_Group3_Poster.pptx
@@ -2863,7 +2863,7 @@
                 <a:cs typeface="Calibri"/>
                 <a:sym typeface="Calibri"/>
               </a:rPr>
-              <a:t>Zulal Akarsu  ·  Jai Sharma  ·  Maria Martin     |     Group 3 · Track 3</a:t>
+              <a:t>Maria Martin  ·  Zulal Akarsu  ·  Jai Sharma     |     Group 3 · Track 3</a:t>
             </a:r>
             <a:endParaRPr b="0" i="0" sz="2400" u="none" cap="none" strike="noStrike">
               <a:solidFill>
